--- a/docs/vzp_pitch/pitch_v2.pptx
+++ b/docs/vzp_pitch/pitch_v2.pptx
@@ -235,7 +235,7 @@
                   <a:srgbClr val="4A4458"/>
                 </a:solidFill>
               </a:rPr>
-              <a:t>Stadium při diagnóze, ≈ 2 300 nádorů ročně (%)</a:t>
+              <a:t>Stadium při diagnóze, ≈ 1 100 nádorů ročně (%)</a:t>
             </a:r>
           </a:p>
         </c:rich>
@@ -780,7 +780,7 @@
           <a:lstStyle/>
           <a:p>
             <a:r>
-              <a:t>40 s. V Česku je 2,19 milionu žen ve věku 45 až 74 let. Za poslední dva roky přišlo na screening 61 procent, zhruba 850 tisíc žen ne. U nich se ročně najde asi 2 300 karcinomů prsu a jen necelá třetina v prvním stadiu; ve screeningu jsou to tři čtvrtiny. Kdyby přišly všechny, šlo by ročně o 2 300 nádorů zachycených dřív, asi 275 odvrácených úmrtí, 1 600 let života ve zdraví a 210 milionů korun čisté úspory. Je to teoretický strop; data VZP pokrývají jeho část, 207 tisíc pozvaných žen, které v roce 2024 nepřišly. (Výpočet v docs/vzp_pitch/dopad.py. Kontrola: incidence NOR 45–74 × podíl bez screeningu = 2 262 nádorů. Čistá úspora platí při ceně léčby IV. stadia 3 mil. Kč, pod 1,9 mil. Kč vychází nula; náklady modelu zahrnují příspěvek 1 000 Kč na vyšetření, ověřit s týmem. Robustní metrika: 0,26 mil. Kč za QALY.)</a:t>
+              <a:t>40 s. V roce 2024 VZP adresně pozvala 256 tisíc žen, které na screening dlouho nepřišly nebo byly zvané poprvé, a 207 tisíc z nich do roka nepřišlo. Kdyby přišly, screening by u nich ročně našel asi 1 100 karcinomů prsu dřív. Bez screeningu je v prvním stadiu necelá třetina nádorů, ve screeningu tři čtvrtiny. Kdyby přišly všechny, šlo by ročně o asi 135 odvrácených úmrtí, 790 let života ve zdraví a 100 milionů korun čisté úspory. To je teoretický strop. (Výpočet v docs/vzp_pitch/dopad.py, jedno vyšetření na ženu ročně. Kontext, nečíst: celostátně je 2,19 mil. žen 45–74, za dva roky přišlo 61 %, tedy nejméně 850 tisíc žen bez screeningu a asi 2 300 nádorů ročně (ČSÚ, ÚZIS, NOR). Čistá úspora platí při ceně léčby IV. stadia 3 mil. Kč, pod 1,9 mil. Kč vychází nula; náklady modelu zahrnují příspěvek 1 000 Kč na vyšetření, ověřit s týmem. Robustní metrika: 0,26 mil. Kč za QALY.)</a:t>
             </a:r>
           </a:p>
         </p:txBody>
@@ -2531,7 +2531,7 @@
           <a:lstStyle/>
           <a:p>
             <a:r>
-              <a:t>U 850 tisíc žen bez screeningu se nádory prsu najdou pozdě</a:t>
+              <a:t>U 207 tisíc pozvaných žen, které nepřišly, se nádory najdou pozdě</a:t>
             </a:r>
           </a:p>
         </p:txBody>
@@ -2569,7 +2569,7 @@
                   <a:srgbClr val="4A4458"/>
                 </a:solidFill>
               </a:rPr>
-              <a:t>Za roky 2023–2024 přišlo na screeningovou mamografii 61 % z 2,19 mil. žen ve věku 45–74 let. U zbylých se ročně zjistí asi 2 300 karcinomů prsu, většinou později, než by je našel screening.</a:t>
+              <a:t>V roce 2024 VZP adresně pozvala 256 466 žen, hlavně ty, které na screening dlouho nepřišly, a ženy zvané poprvé. Do 12 měsíců jich přišlo 19 %. Kdyby přišly všechny, screening by ročně našel asi 1 100 karcinomů prsu dřív.</a:t>
             </a:r>
           </a:p>
         </p:txBody>
@@ -2577,45 +2577,6 @@
       <p:sp>
         <p:nvSpPr>
           <p:cNvPr id="5" name="Rounded Rectangle 4"/>
-          <p:cNvSpPr/>
-          <p:nvPr/>
-        </p:nvSpPr>
-        <p:spPr>
-          <a:xfrm>
-            <a:off x="8403336" y="457200"/>
-            <a:ext cx="1005840" cy="246888"/>
-          </a:xfrm>
-          <a:prstGeom prst="roundRect">
-            <a:avLst>
-              <a:gd name="adj" fmla="val 50000"/>
-            </a:avLst>
-          </a:prstGeom>
-          <a:solidFill>
-            <a:srgbClr val="7A78C3"/>
-          </a:solidFill>
-          <a:ln>
-            <a:noFill/>
-          </a:ln>
-        </p:spPr>
-        <p:txBody>
-          <a:bodyPr rtlCol="0" anchor="ctr" lIns="0" rIns="0" tIns="0" bIns="0"/>
-          <a:lstStyle/>
-          <a:p>
-            <a:pPr algn="ctr"/>
-            <a:r>
-              <a:rPr sz="900" b="1">
-                <a:solidFill>
-                  <a:srgbClr val="FFFFFF"/>
-                </a:solidFill>
-              </a:rPr>
-              <a:t>ÚZIS a ČSÚ</a:t>
-            </a:r>
-          </a:p>
-        </p:txBody>
-      </p:sp>
-      <p:sp>
-        <p:nvSpPr>
-          <p:cNvPr id="6" name="Rounded Rectangle 5"/>
           <p:cNvSpPr/>
           <p:nvPr/>
         </p:nvSpPr>
@@ -2654,7 +2615,7 @@
       </p:sp>
       <p:sp>
         <p:nvSpPr>
-          <p:cNvPr id="7" name="Rounded Rectangle 6"/>
+          <p:cNvPr id="6" name="Rounded Rectangle 5"/>
           <p:cNvSpPr/>
           <p:nvPr/>
         </p:nvSpPr>
@@ -2693,7 +2654,7 @@
       </p:sp>
       <p:sp>
         <p:nvSpPr>
-          <p:cNvPr id="8" name="Rounded Rectangle 7"/>
+          <p:cNvPr id="7" name="Rounded Rectangle 6"/>
           <p:cNvSpPr/>
           <p:nvPr/>
         </p:nvSpPr>
@@ -2726,7 +2687,7 @@
       </p:sp>
       <p:sp>
         <p:nvSpPr>
-          <p:cNvPr id="9" name="TextBox 8"/>
+          <p:cNvPr id="8" name="TextBox 7"/>
           <p:cNvSpPr txBox="1"/>
           <p:nvPr/>
         </p:nvSpPr>
@@ -2757,14 +2718,14 @@
                   <a:srgbClr val="003B7A"/>
                 </a:solidFill>
               </a:rPr>
-              <a:t>2,19 mil.</a:t>
-            </a:r>
-          </a:p>
-        </p:txBody>
-      </p:sp>
-      <p:sp>
-        <p:nvSpPr>
-          <p:cNvPr id="10" name="TextBox 9"/>
+              <a:t>256 466</a:t>
+            </a:r>
+          </a:p>
+        </p:txBody>
+      </p:sp>
+      <p:sp>
+        <p:nvSpPr>
+          <p:cNvPr id="9" name="TextBox 8"/>
           <p:cNvSpPr txBox="1"/>
           <p:nvPr/>
         </p:nvSpPr>
@@ -2795,14 +2756,14 @@
                   <a:srgbClr val="4A4458"/>
                 </a:solidFill>
               </a:rPr>
-              <a:t>žen ve věku 45–74 let (ČSÚ 2024)</a:t>
-            </a:r>
-          </a:p>
-        </p:txBody>
-      </p:sp>
-      <p:sp>
-        <p:nvSpPr>
-          <p:cNvPr id="11" name="Right Arrow 10"/>
+              <a:t>žen VZP v roce 2024 adresně pozvala (nechodí na screening nebo zvané poprvé)</a:t>
+            </a:r>
+          </a:p>
+        </p:txBody>
+      </p:sp>
+      <p:sp>
+        <p:nvSpPr>
+          <p:cNvPr id="10" name="Right Arrow 9"/>
           <p:cNvSpPr/>
           <p:nvPr/>
         </p:nvSpPr>
@@ -2831,7 +2792,7 @@
       </p:sp>
       <p:sp>
         <p:nvSpPr>
-          <p:cNvPr id="12" name="Rounded Rectangle 11"/>
+          <p:cNvPr id="11" name="Rounded Rectangle 10"/>
           <p:cNvSpPr/>
           <p:nvPr/>
         </p:nvSpPr>
@@ -2864,7 +2825,7 @@
       </p:sp>
       <p:sp>
         <p:nvSpPr>
-          <p:cNvPr id="13" name="TextBox 12"/>
+          <p:cNvPr id="12" name="TextBox 11"/>
           <p:cNvSpPr txBox="1"/>
           <p:nvPr/>
         </p:nvSpPr>
@@ -2895,14 +2856,14 @@
                   <a:srgbClr val="3D7CC9"/>
                 </a:solidFill>
               </a:rPr>
-              <a:t>61 %</a:t>
-            </a:r>
-          </a:p>
-        </p:txBody>
-      </p:sp>
-      <p:sp>
-        <p:nvSpPr>
-          <p:cNvPr id="14" name="TextBox 13"/>
+              <a:t>19 %</a:t>
+            </a:r>
+          </a:p>
+        </p:txBody>
+      </p:sp>
+      <p:sp>
+        <p:nvSpPr>
+          <p:cNvPr id="13" name="TextBox 12"/>
           <p:cNvSpPr txBox="1"/>
           <p:nvPr/>
         </p:nvSpPr>
@@ -2933,14 +2894,14 @@
                   <a:srgbClr val="4A4458"/>
                 </a:solidFill>
               </a:rPr>
-              <a:t>přišlo na screening za 2 roky (ÚZIS 2023–24)</a:t>
-            </a:r>
-          </a:p>
-        </p:txBody>
-      </p:sp>
-      <p:sp>
-        <p:nvSpPr>
-          <p:cNvPr id="15" name="Right Arrow 14"/>
+              <a:t>přišlo do 12 měsíců</a:t>
+            </a:r>
+          </a:p>
+        </p:txBody>
+      </p:sp>
+      <p:sp>
+        <p:nvSpPr>
+          <p:cNvPr id="14" name="Right Arrow 13"/>
           <p:cNvSpPr/>
           <p:nvPr/>
         </p:nvSpPr>
@@ -2969,7 +2930,7 @@
       </p:sp>
       <p:sp>
         <p:nvSpPr>
-          <p:cNvPr id="16" name="Rounded Rectangle 15"/>
+          <p:cNvPr id="15" name="Rounded Rectangle 14"/>
           <p:cNvSpPr/>
           <p:nvPr/>
         </p:nvSpPr>
@@ -3002,7 +2963,7 @@
       </p:sp>
       <p:sp>
         <p:nvSpPr>
-          <p:cNvPr id="17" name="TextBox 16"/>
+          <p:cNvPr id="16" name="TextBox 15"/>
           <p:cNvSpPr txBox="1"/>
           <p:nvPr/>
         </p:nvSpPr>
@@ -3033,14 +2994,14 @@
                   <a:srgbClr val="D27869"/>
                 </a:solidFill>
               </a:rPr>
-              <a:t>≈ 850 tis.</a:t>
-            </a:r>
-          </a:p>
-        </p:txBody>
-      </p:sp>
-      <p:sp>
-        <p:nvSpPr>
-          <p:cNvPr id="18" name="TextBox 17"/>
+              <a:t>207 201</a:t>
+            </a:r>
+          </a:p>
+        </p:txBody>
+      </p:sp>
+      <p:sp>
+        <p:nvSpPr>
+          <p:cNvPr id="17" name="TextBox 16"/>
           <p:cNvSpPr txBox="1"/>
           <p:nvPr/>
         </p:nvSpPr>
@@ -3071,14 +3032,14 @@
                   <a:srgbClr val="4A4458"/>
                 </a:solidFill>
               </a:rPr>
-              <a:t>žen bez mamografie; z nich 207 tis. pozvaných VZP v roce 2024 nepřišlo</a:t>
+              <a:t>žen nepřišlo</a:t>
             </a:r>
           </a:p>
         </p:txBody>
       </p:sp>
       <p:graphicFrame>
         <p:nvGraphicFramePr>
-          <p:cNvPr id="19" name="Chart 18"/>
+          <p:cNvPr id="18" name="Chart 17"/>
           <p:cNvGraphicFramePr>
             <a:graphicFrameLocks noGrp="1"/>
           </p:cNvGraphicFramePr>
@@ -3096,7 +3057,7 @@
       </p:graphicFrame>
       <p:sp>
         <p:nvSpPr>
-          <p:cNvPr id="20" name="TextBox 19"/>
+          <p:cNvPr id="19" name="TextBox 18"/>
           <p:cNvSpPr txBox="1"/>
           <p:nvPr/>
         </p:nvSpPr>
@@ -3134,7 +3095,7 @@
       </p:sp>
       <p:sp>
         <p:nvSpPr>
-          <p:cNvPr id="21" name="Rounded Rectangle 20"/>
+          <p:cNvPr id="20" name="Rounded Rectangle 19"/>
           <p:cNvSpPr/>
           <p:nvPr/>
         </p:nvSpPr>
@@ -3167,7 +3128,7 @@
       </p:sp>
       <p:sp>
         <p:nvSpPr>
-          <p:cNvPr id="22" name="TextBox 21"/>
+          <p:cNvPr id="21" name="TextBox 20"/>
           <p:cNvSpPr txBox="1"/>
           <p:nvPr/>
         </p:nvSpPr>
@@ -3220,7 +3181,7 @@
       </p:sp>
       <p:sp>
         <p:nvSpPr>
-          <p:cNvPr id="23" name="TextBox 22"/>
+          <p:cNvPr id="22" name="TextBox 21"/>
           <p:cNvSpPr txBox="1"/>
           <p:nvPr/>
         </p:nvSpPr>
@@ -3251,14 +3212,14 @@
                   <a:srgbClr val="D27869"/>
                 </a:solidFill>
               </a:rPr>
-              <a:t>≈ 2 300</a:t>
-            </a:r>
-          </a:p>
-        </p:txBody>
-      </p:sp>
-      <p:sp>
-        <p:nvSpPr>
-          <p:cNvPr id="24" name="TextBox 23"/>
+              <a:t>≈ 1 100</a:t>
+            </a:r>
+          </a:p>
+        </p:txBody>
+      </p:sp>
+      <p:sp>
+        <p:nvSpPr>
+          <p:cNvPr id="23" name="TextBox 22"/>
           <p:cNvSpPr txBox="1"/>
           <p:nvPr/>
         </p:nvSpPr>
@@ -3296,7 +3257,7 @@
       </p:sp>
       <p:sp>
         <p:nvSpPr>
-          <p:cNvPr id="25" name="TextBox 24"/>
+          <p:cNvPr id="24" name="TextBox 23"/>
           <p:cNvSpPr txBox="1"/>
           <p:nvPr/>
         </p:nvSpPr>
@@ -3327,14 +3288,14 @@
                   <a:srgbClr val="D27869"/>
                 </a:solidFill>
               </a:rPr>
-              <a:t>≈ 275</a:t>
-            </a:r>
-          </a:p>
-        </p:txBody>
-      </p:sp>
-      <p:sp>
-        <p:nvSpPr>
-          <p:cNvPr id="26" name="TextBox 25"/>
+              <a:t>≈ 135</a:t>
+            </a:r>
+          </a:p>
+        </p:txBody>
+      </p:sp>
+      <p:sp>
+        <p:nvSpPr>
+          <p:cNvPr id="25" name="TextBox 24"/>
           <p:cNvSpPr txBox="1"/>
           <p:nvPr/>
         </p:nvSpPr>
@@ -3372,7 +3333,7 @@
       </p:sp>
       <p:sp>
         <p:nvSpPr>
-          <p:cNvPr id="27" name="TextBox 26"/>
+          <p:cNvPr id="26" name="TextBox 25"/>
           <p:cNvSpPr txBox="1"/>
           <p:nvPr/>
         </p:nvSpPr>
@@ -3403,14 +3364,14 @@
                   <a:srgbClr val="D27869"/>
                 </a:solidFill>
               </a:rPr>
-              <a:t>≈ 1 600</a:t>
-            </a:r>
-          </a:p>
-        </p:txBody>
-      </p:sp>
-      <p:sp>
-        <p:nvSpPr>
-          <p:cNvPr id="28" name="TextBox 27"/>
+              <a:t>≈ 790</a:t>
+            </a:r>
+          </a:p>
+        </p:txBody>
+      </p:sp>
+      <p:sp>
+        <p:nvSpPr>
+          <p:cNvPr id="27" name="TextBox 26"/>
           <p:cNvSpPr txBox="1"/>
           <p:nvPr/>
         </p:nvSpPr>
@@ -3448,7 +3409,7 @@
       </p:sp>
       <p:sp>
         <p:nvSpPr>
-          <p:cNvPr id="29" name="TextBox 28"/>
+          <p:cNvPr id="28" name="TextBox 27"/>
           <p:cNvSpPr txBox="1"/>
           <p:nvPr/>
         </p:nvSpPr>
@@ -3479,14 +3440,14 @@
                   <a:srgbClr val="D27869"/>
                 </a:solidFill>
               </a:rPr>
-              <a:t>≈ 210 mil. Kč</a:t>
-            </a:r>
-          </a:p>
-        </p:txBody>
-      </p:sp>
-      <p:sp>
-        <p:nvSpPr>
-          <p:cNvPr id="30" name="TextBox 29"/>
+              <a:t>≈ 100 mil. Kč</a:t>
+            </a:r>
+          </a:p>
+        </p:txBody>
+      </p:sp>
+      <p:sp>
+        <p:nvSpPr>
+          <p:cNvPr id="29" name="TextBox 28"/>
           <p:cNvSpPr txBox="1"/>
           <p:nvPr/>
         </p:nvSpPr>
@@ -3524,7 +3485,7 @@
       </p:sp>
       <p:sp>
         <p:nvSpPr>
-          <p:cNvPr id="31" name="TextBox 30"/>
+          <p:cNvPr id="30" name="TextBox 29"/>
           <p:cNvSpPr txBox="1"/>
           <p:nvPr/>
         </p:nvSpPr>
@@ -3555,7 +3516,7 @@
                   <a:srgbClr val="8A8597"/>
                 </a:solidFill>
               </a:rPr>
-              <a:t>Zdroj: ČSÚ 2024, ÚZIS PPS 2023–24, NOR 2024; stadia: audit screeningu 2023, ÚZIS 2022; finanční model týmu (docs/vzp_pitch/dopad.py)</a:t>
+              <a:t>Zdroj: data VZP pro Rakathon 2026, pozvánky 2024; stadia: audit screeningu 2023, ÚZIS 2022; finanční model týmu (docs/vzp_pitch/dopad.py)</a:t>
             </a:r>
           </a:p>
         </p:txBody>
@@ -7902,7 +7863,7 @@
                   <a:srgbClr val="4A4458"/>
                 </a:solidFill>
               </a:rPr>
-              <a:t>2–5 % teoretického stropu</a:t>
+              <a:t>5–10 % teoretického stropu</a:t>
             </a:r>
             <a:r>
               <a:rPr sz="1050" b="0">
@@ -7910,7 +7871,7 @@
                   <a:srgbClr val="4A4458"/>
                 </a:solidFill>
               </a:rPr>
-              <a:t>, jen z cílených kanálů v datech VZP. Plošná digitální kaskáda podle finančního modelu přinese 156 mil. Kč čistě za 2027–2031.</a:t>
+              <a:t>, jen z cílených kanálů v segmentech B–E. Plošná digitální kaskáda podle finančního modelu přinese 156 mil. Kč čistě za 2027–2031.</a:t>
             </a:r>
           </a:p>
           <a:p>

--- a/docs/vzp_pitch/pitch_v2.pptx
+++ b/docs/vzp_pitch/pitch_v2.pptx
@@ -235,7 +235,7 @@
                   <a:srgbClr val="4A4458"/>
                 </a:solidFill>
               </a:rPr>
-              <a:t>Stadium při diagnóze, ≈ 1 100 nádorů ročně (%)</a:t>
+              <a:t>Stadium při diagnóze, ≈ 1 300 nádorů ročně (%)</a:t>
             </a:r>
           </a:p>
         </c:rich>
@@ -467,26 +467,6 @@
             </c:numRef>
           </c:val>
         </c:ser>
-        <c:dLbls>
-          <c:numFmt formatCode="0.0" sourceLinked="0"/>
-          <c:txPr>
-            <a:bodyPr/>
-            <a:lstStyle/>
-            <a:p>
-              <a:pPr>
-                <a:defRPr sz="1000"/>
-              </a:pPr>
-            </a:p>
-          </c:txPr>
-          <c:dLblPos val="ctr"/>
-          <c:showLegendKey val="0"/>
-          <c:showVal val="1"/>
-          <c:showCatName val="0"/>
-          <c:showSerName val="0"/>
-          <c:showPercent val="0"/>
-          <c:showBubbleSize val="0"/>
-          <c:showLeaderLines val="1"/>
-        </c:dLbls>
         <c:gapWidth val="45"/>
         <c:overlap val="100"/>
         <c:axId val="-2068027336"/>
@@ -780,7 +760,7 @@
           <a:lstStyle/>
           <a:p>
             <a:r>
-              <a:t>40 s. V roce 2024 VZP adresně pozvala 256 tisíc žen, které na screening dlouho nepřišly nebo byly zvané poprvé, a 207 tisíc z nich do roka nepřišlo. Kdyby přišly, screening by u nich ročně našel asi 1 100 karcinomů prsu dřív. Bez screeningu je v prvním stadiu necelá třetina nádorů, ve screeningu tři čtvrtiny. Kdyby přišly všechny, šlo by ročně o asi 135 odvrácených úmrtí, 790 let života ve zdraví a 100 milionů korun čisté úspory. To je teoretický strop. (Výpočet v docs/vzp_pitch/dopad.py, jedno vyšetření na ženu ročně. Kontext, nečíst: celostátně je 2,19 mil. žen 45–74, za dva roky přišlo 61 %, tedy nejméně 850 tisíc žen bez screeningu a asi 2 300 nádorů ročně (ČSÚ, ÚZIS, NOR). Čistá úspora platí při ceně léčby IV. stadia 3 mil. Kč, pod 1,9 mil. Kč vychází nula; náklady modelu zahrnují příspěvek 1 000 Kč na vyšetření, ověřit s týmem. Robustní metrika: 0,26 mil. Kč za QALY.)</a:t>
+              <a:t>40 s. Za poslední dva roky přišlo na screening jen 61 procent žen ve věku 45 až 74 let; bez mamografie je nejméně 480 tisíc klientek VZP. Screening by u nich ročně našel asi 1 300 nádorů dřív: bez screeningu je v prvním stadiu necelá třetina, ve screeningu tři čtvrtiny. Kdyby přišly všechny, šlo by ročně o 155 odvrácených úmrtí, 920 let života ve zdraví a 120 milionů korun. To je teoretický strop. (Výpočet v docs/vzp_pitch/dopad.py: 847 770 žen bez mamografie (ČSÚ, ÚZIS) × podíl VZP 56,7 % (MZ ČR, Hodnocení v. z. p. 2023; podíl státních pojištěnců je u všech pojišťoven podobný, věková struktura tedy také); strop = každá jednou za dva roky. Kontrola: incidence NOR × podíl bez screeningu × podíl VZP = 1 282 nádorů. Čistá úspora platí při ceně léčby IV. stadia 3 mil. Kč, pod 1,9 mil. Kč vychází nula; náklady modelu zahrnují příspěvek 1 000 Kč na vyšetření, ověřit s týmem. Robustní metrika: 0,26 mil. Kč za QALY.)</a:t>
             </a:r>
           </a:p>
         </p:txBody>
@@ -964,7 +944,7 @@
           <a:lstStyle/>
           <a:p>
             <a:r>
-              <a:t>40 s. Náš výsledek. Z 207 tisíc žen, které v roce 2024 nepřišly, je 159 tisíc v segmentech B až E, kde máme kanál s doloženým účinkem. Podle rozpětí ze studií získáme 9 až 21 tisíc mamografií ročně. To je 52 až 116 nádorů zachycených dřív, 6 až 14 odvrácených úmrtí, 36 až 80 let života ve zdraví a 5 až 10 milionů korun čisté úspory ročně. Plošná digitální kaskáda by podle finančního modelu přinesla víc. Nabízíme VZP pilot s randomizací, model i kód předáme. Děkujeme. (Mamografie navíc: B+C 66 037 žen × 10–19 p. b., D+E 140 398 žen × 2–6 p. b.; metriky na 1 000 vyšetření z finančního modelu a modelu posunu stadia, viz dopad.py.)</a:t>
+              <a:t>40 s. Náš výsledek. Z 480 tisíc klientek VZP bez mamografie jsou asi tři čtvrtiny v segmentech B až E, kde máme kanál s doloženým účinkem. Podle rozpětí ze studií získáme 22 až 49 tisíc mamografií ročně. To je 120 až 268 nádorů zachycených dřív, 14 až 32 odvrácených úmrtí, 83 až 186 let života ve zdraví a 11 až 24 milionů korun čisté úspory ročně. Nabízíme VZP pilot s randomizací, model i kód předáme. Děkujeme. (Mamografie navíc: B+C 66 037 žen × 10–19 p. b. a D+E 140 398 žen × 2–6 p. b. z pozvánek 2024, vynásobeno 2,32 = klientky VZP bez screeningu / nepřišlé v pozvánkách 2024, tedy stejné rozložení segmentů. Plošná SMS: 480 428 × 2–5 p. b.; nesčítá se s cílenými kanály. Metriky na 1 000 vyšetření z finančního modelu a modelu posunu stadia, viz dopad.py.)</a:t>
             </a:r>
           </a:p>
         </p:txBody>
@@ -2531,7 +2511,7 @@
           <a:lstStyle/>
           <a:p>
             <a:r>
-              <a:t>U 207 tisíc pozvaných žen, které nepřišly, se nádory najdou pozdě</a:t>
+              <a:t>U 480 tisíc klientek VZP bez screeningu se nádory prsu najdou pozdě</a:t>
             </a:r>
           </a:p>
         </p:txBody>
@@ -2569,7 +2549,7 @@
                   <a:srgbClr val="4A4458"/>
                 </a:solidFill>
               </a:rPr>
-              <a:t>V roce 2024 VZP adresně pozvala 256 466 žen, hlavně ty, které na screening dlouho nepřišly, a ženy zvané poprvé. Do 12 měsíců jich přišlo 19 %. Kdyby přišly všechny, screening by ročně našel asi 1 100 karcinomů prsu dřív.</a:t>
+              <a:t>Za roky 2023–2024 přišlo na screeningovou mamografii jen 61 % žen ve věku 45–74 let. Klientek VZP bez mamografie je nejméně 480 tisíc; screening by u nich ročně našel asi 1 300 karcinomů prsu dřív.</a:t>
             </a:r>
           </a:p>
         </p:txBody>
@@ -2577,6 +2557,45 @@
       <p:sp>
         <p:nvSpPr>
           <p:cNvPr id="5" name="Rounded Rectangle 4"/>
+          <p:cNvSpPr/>
+          <p:nvPr/>
+        </p:nvSpPr>
+        <p:spPr>
+          <a:xfrm>
+            <a:off x="8403336" y="457200"/>
+            <a:ext cx="1005840" cy="246888"/>
+          </a:xfrm>
+          <a:prstGeom prst="roundRect">
+            <a:avLst>
+              <a:gd name="adj" fmla="val 50000"/>
+            </a:avLst>
+          </a:prstGeom>
+          <a:solidFill>
+            <a:srgbClr val="7A78C3"/>
+          </a:solidFill>
+          <a:ln>
+            <a:noFill/>
+          </a:ln>
+        </p:spPr>
+        <p:txBody>
+          <a:bodyPr rtlCol="0" anchor="ctr" lIns="0" rIns="0" tIns="0" bIns="0"/>
+          <a:lstStyle/>
+          <a:p>
+            <a:pPr algn="ctr"/>
+            <a:r>
+              <a:rPr sz="900" b="1">
+                <a:solidFill>
+                  <a:srgbClr val="FFFFFF"/>
+                </a:solidFill>
+              </a:rPr>
+              <a:t>ÚZIS a ČSÚ</a:t>
+            </a:r>
+          </a:p>
+        </p:txBody>
+      </p:sp>
+      <p:sp>
+        <p:nvSpPr>
+          <p:cNvPr id="6" name="Rounded Rectangle 5"/>
           <p:cNvSpPr/>
           <p:nvPr/>
         </p:nvSpPr>
@@ -2615,7 +2634,7 @@
       </p:sp>
       <p:sp>
         <p:nvSpPr>
-          <p:cNvPr id="6" name="Rounded Rectangle 5"/>
+          <p:cNvPr id="7" name="Rounded Rectangle 6"/>
           <p:cNvSpPr/>
           <p:nvPr/>
         </p:nvSpPr>
@@ -2654,7 +2673,7 @@
       </p:sp>
       <p:sp>
         <p:nvSpPr>
-          <p:cNvPr id="7" name="Rounded Rectangle 6"/>
+          <p:cNvPr id="8" name="Rounded Rectangle 7"/>
           <p:cNvSpPr/>
           <p:nvPr/>
         </p:nvSpPr>
@@ -2687,7 +2706,7 @@
       </p:sp>
       <p:sp>
         <p:nvSpPr>
-          <p:cNvPr id="8" name="TextBox 7"/>
+          <p:cNvPr id="9" name="TextBox 8"/>
           <p:cNvSpPr txBox="1"/>
           <p:nvPr/>
         </p:nvSpPr>
@@ -2718,14 +2737,14 @@
                   <a:srgbClr val="003B7A"/>
                 </a:solidFill>
               </a:rPr>
-              <a:t>256 466</a:t>
-            </a:r>
-          </a:p>
-        </p:txBody>
-      </p:sp>
-      <p:sp>
-        <p:nvSpPr>
-          <p:cNvPr id="9" name="TextBox 8"/>
+              <a:t>≈ 848 tis.</a:t>
+            </a:r>
+          </a:p>
+        </p:txBody>
+      </p:sp>
+      <p:sp>
+        <p:nvSpPr>
+          <p:cNvPr id="10" name="TextBox 9"/>
           <p:cNvSpPr txBox="1"/>
           <p:nvPr/>
         </p:nvSpPr>
@@ -2756,14 +2775,14 @@
                   <a:srgbClr val="4A4458"/>
                 </a:solidFill>
               </a:rPr>
-              <a:t>žen VZP v roce 2024 adresně pozvala (nechodí na screening nebo zvané poprvé)</a:t>
-            </a:r>
-          </a:p>
-        </p:txBody>
-      </p:sp>
-      <p:sp>
-        <p:nvSpPr>
-          <p:cNvPr id="10" name="Right Arrow 9"/>
+              <a:t>žen 45–74 bez mamografie za 2 roky (ÚZIS, ČSÚ)</a:t>
+            </a:r>
+          </a:p>
+        </p:txBody>
+      </p:sp>
+      <p:sp>
+        <p:nvSpPr>
+          <p:cNvPr id="11" name="Right Arrow 10"/>
           <p:cNvSpPr/>
           <p:nvPr/>
         </p:nvSpPr>
@@ -2792,7 +2811,7 @@
       </p:sp>
       <p:sp>
         <p:nvSpPr>
-          <p:cNvPr id="11" name="Rounded Rectangle 10"/>
+          <p:cNvPr id="12" name="Rounded Rectangle 11"/>
           <p:cNvSpPr/>
           <p:nvPr/>
         </p:nvSpPr>
@@ -2825,7 +2844,7 @@
       </p:sp>
       <p:sp>
         <p:nvSpPr>
-          <p:cNvPr id="12" name="TextBox 11"/>
+          <p:cNvPr id="13" name="TextBox 12"/>
           <p:cNvSpPr txBox="1"/>
           <p:nvPr/>
         </p:nvSpPr>
@@ -2856,14 +2875,14 @@
                   <a:srgbClr val="3D7CC9"/>
                 </a:solidFill>
               </a:rPr>
-              <a:t>19 %</a:t>
-            </a:r>
-          </a:p>
-        </p:txBody>
-      </p:sp>
-      <p:sp>
-        <p:nvSpPr>
-          <p:cNvPr id="13" name="TextBox 12"/>
+              <a:t>56,7 %</a:t>
+            </a:r>
+          </a:p>
+        </p:txBody>
+      </p:sp>
+      <p:sp>
+        <p:nvSpPr>
+          <p:cNvPr id="14" name="TextBox 13"/>
           <p:cNvSpPr txBox="1"/>
           <p:nvPr/>
         </p:nvSpPr>
@@ -2894,14 +2913,14 @@
                   <a:srgbClr val="4A4458"/>
                 </a:solidFill>
               </a:rPr>
-              <a:t>přišlo do 12 měsíců</a:t>
-            </a:r>
-          </a:p>
-        </p:txBody>
-      </p:sp>
-      <p:sp>
-        <p:nvSpPr>
-          <p:cNvPr id="14" name="Right Arrow 13"/>
+              <a:t>pojištěnců je u VZP (MZ ČR 2023)</a:t>
+            </a:r>
+          </a:p>
+        </p:txBody>
+      </p:sp>
+      <p:sp>
+        <p:nvSpPr>
+          <p:cNvPr id="15" name="Right Arrow 14"/>
           <p:cNvSpPr/>
           <p:nvPr/>
         </p:nvSpPr>
@@ -2930,7 +2949,7 @@
       </p:sp>
       <p:sp>
         <p:nvSpPr>
-          <p:cNvPr id="15" name="Rounded Rectangle 14"/>
+          <p:cNvPr id="16" name="Rounded Rectangle 15"/>
           <p:cNvSpPr/>
           <p:nvPr/>
         </p:nvSpPr>
@@ -2963,7 +2982,7 @@
       </p:sp>
       <p:sp>
         <p:nvSpPr>
-          <p:cNvPr id="16" name="TextBox 15"/>
+          <p:cNvPr id="17" name="TextBox 16"/>
           <p:cNvSpPr txBox="1"/>
           <p:nvPr/>
         </p:nvSpPr>
@@ -2994,14 +3013,14 @@
                   <a:srgbClr val="D27869"/>
                 </a:solidFill>
               </a:rPr>
-              <a:t>207 201</a:t>
-            </a:r>
-          </a:p>
-        </p:txBody>
-      </p:sp>
-      <p:sp>
-        <p:nvSpPr>
-          <p:cNvPr id="17" name="TextBox 16"/>
+              <a:t>≈ 480 tis.</a:t>
+            </a:r>
+          </a:p>
+        </p:txBody>
+      </p:sp>
+      <p:sp>
+        <p:nvSpPr>
+          <p:cNvPr id="18" name="TextBox 17"/>
           <p:cNvSpPr txBox="1"/>
           <p:nvPr/>
         </p:nvSpPr>
@@ -3032,14 +3051,14 @@
                   <a:srgbClr val="4A4458"/>
                 </a:solidFill>
               </a:rPr>
-              <a:t>žen nepřišlo</a:t>
+              <a:t>klientek VZP bez mamografie; 207 tis. z nich vidíme v pozvánkách 2024</a:t>
             </a:r>
           </a:p>
         </p:txBody>
       </p:sp>
       <p:graphicFrame>
         <p:nvGraphicFramePr>
-          <p:cNvPr id="18" name="Chart 17"/>
+          <p:cNvPr id="19" name="Chart 18"/>
           <p:cNvGraphicFramePr>
             <a:graphicFrameLocks noGrp="1"/>
           </p:cNvGraphicFramePr>
@@ -3057,7 +3076,7 @@
       </p:graphicFrame>
       <p:sp>
         <p:nvSpPr>
-          <p:cNvPr id="19" name="TextBox 18"/>
+          <p:cNvPr id="20" name="TextBox 19"/>
           <p:cNvSpPr txBox="1"/>
           <p:nvPr/>
         </p:nvSpPr>
@@ -3095,7 +3114,7 @@
       </p:sp>
       <p:sp>
         <p:nvSpPr>
-          <p:cNvPr id="20" name="Rounded Rectangle 19"/>
+          <p:cNvPr id="21" name="Rounded Rectangle 20"/>
           <p:cNvSpPr/>
           <p:nvPr/>
         </p:nvSpPr>
@@ -3128,7 +3147,7 @@
       </p:sp>
       <p:sp>
         <p:nvSpPr>
-          <p:cNvPr id="21" name="TextBox 20"/>
+          <p:cNvPr id="22" name="TextBox 21"/>
           <p:cNvSpPr txBox="1"/>
           <p:nvPr/>
         </p:nvSpPr>
@@ -3181,7 +3200,7 @@
       </p:sp>
       <p:sp>
         <p:nvSpPr>
-          <p:cNvPr id="22" name="TextBox 21"/>
+          <p:cNvPr id="23" name="TextBox 22"/>
           <p:cNvSpPr txBox="1"/>
           <p:nvPr/>
         </p:nvSpPr>
@@ -3212,14 +3231,14 @@
                   <a:srgbClr val="D27869"/>
                 </a:solidFill>
               </a:rPr>
-              <a:t>≈ 1 100</a:t>
-            </a:r>
-          </a:p>
-        </p:txBody>
-      </p:sp>
-      <p:sp>
-        <p:nvSpPr>
-          <p:cNvPr id="23" name="TextBox 22"/>
+              <a:t>≈ 1 300</a:t>
+            </a:r>
+          </a:p>
+        </p:txBody>
+      </p:sp>
+      <p:sp>
+        <p:nvSpPr>
+          <p:cNvPr id="24" name="TextBox 23"/>
           <p:cNvSpPr txBox="1"/>
           <p:nvPr/>
         </p:nvSpPr>
@@ -3257,7 +3276,7 @@
       </p:sp>
       <p:sp>
         <p:nvSpPr>
-          <p:cNvPr id="24" name="TextBox 23"/>
+          <p:cNvPr id="25" name="TextBox 24"/>
           <p:cNvSpPr txBox="1"/>
           <p:nvPr/>
         </p:nvSpPr>
@@ -3288,14 +3307,14 @@
                   <a:srgbClr val="D27869"/>
                 </a:solidFill>
               </a:rPr>
-              <a:t>≈ 135</a:t>
-            </a:r>
-          </a:p>
-        </p:txBody>
-      </p:sp>
-      <p:sp>
-        <p:nvSpPr>
-          <p:cNvPr id="25" name="TextBox 24"/>
+              <a:t>≈ 155</a:t>
+            </a:r>
+          </a:p>
+        </p:txBody>
+      </p:sp>
+      <p:sp>
+        <p:nvSpPr>
+          <p:cNvPr id="26" name="TextBox 25"/>
           <p:cNvSpPr txBox="1"/>
           <p:nvPr/>
         </p:nvSpPr>
@@ -3333,7 +3352,7 @@
       </p:sp>
       <p:sp>
         <p:nvSpPr>
-          <p:cNvPr id="26" name="TextBox 25"/>
+          <p:cNvPr id="27" name="TextBox 26"/>
           <p:cNvSpPr txBox="1"/>
           <p:nvPr/>
         </p:nvSpPr>
@@ -3364,14 +3383,14 @@
                   <a:srgbClr val="D27869"/>
                 </a:solidFill>
               </a:rPr>
-              <a:t>≈ 790</a:t>
-            </a:r>
-          </a:p>
-        </p:txBody>
-      </p:sp>
-      <p:sp>
-        <p:nvSpPr>
-          <p:cNvPr id="27" name="TextBox 26"/>
+              <a:t>≈ 920</a:t>
+            </a:r>
+          </a:p>
+        </p:txBody>
+      </p:sp>
+      <p:sp>
+        <p:nvSpPr>
+          <p:cNvPr id="28" name="TextBox 27"/>
           <p:cNvSpPr txBox="1"/>
           <p:nvPr/>
         </p:nvSpPr>
@@ -3409,7 +3428,7 @@
       </p:sp>
       <p:sp>
         <p:nvSpPr>
-          <p:cNvPr id="28" name="TextBox 27"/>
+          <p:cNvPr id="29" name="TextBox 28"/>
           <p:cNvSpPr txBox="1"/>
           <p:nvPr/>
         </p:nvSpPr>
@@ -3440,14 +3459,14 @@
                   <a:srgbClr val="D27869"/>
                 </a:solidFill>
               </a:rPr>
-              <a:t>≈ 100 mil. Kč</a:t>
-            </a:r>
-          </a:p>
-        </p:txBody>
-      </p:sp>
-      <p:sp>
-        <p:nvSpPr>
-          <p:cNvPr id="29" name="TextBox 28"/>
+              <a:t>≈ 120 mil. Kč</a:t>
+            </a:r>
+          </a:p>
+        </p:txBody>
+      </p:sp>
+      <p:sp>
+        <p:nvSpPr>
+          <p:cNvPr id="30" name="TextBox 29"/>
           <p:cNvSpPr txBox="1"/>
           <p:nvPr/>
         </p:nvSpPr>
@@ -3485,7 +3504,7 @@
       </p:sp>
       <p:sp>
         <p:nvSpPr>
-          <p:cNvPr id="30" name="TextBox 29"/>
+          <p:cNvPr id="31" name="TextBox 30"/>
           <p:cNvSpPr txBox="1"/>
           <p:nvPr/>
         </p:nvSpPr>
@@ -3516,7 +3535,7 @@
                   <a:srgbClr val="8A8597"/>
                 </a:solidFill>
               </a:rPr>
-              <a:t>Zdroj: data VZP pro Rakathon 2026, pozvánky 2024; stadia: audit screeningu 2023, ÚZIS 2022; finanční model týmu (docs/vzp_pitch/dopad.py)</a:t>
+              <a:t>Zdroj: ÚZIS 2023–24, ČSÚ 2024, MZ ČR 2023, data VZP 2024; stadia: audit 2023, ÚZIS 2022; finanční model týmu (dopad.py)</a:t>
             </a:r>
           </a:p>
         </p:txBody>
@@ -6855,7 +6874,7 @@
           <a:lstStyle/>
           <a:p>
             <a:r>
-              <a:t>Cílenými kanály získáme 9–21 tisíc mamografií ročně</a:t>
+              <a:t>Cílenými kanály získáme 22–49 tisíc mamografií ročně</a:t>
             </a:r>
           </a:p>
         </p:txBody>
@@ -6893,7 +6912,7 @@
                   <a:srgbClr val="4A4458"/>
                 </a:solidFill>
               </a:rPr>
-              <a:t>Počítáme jen s ženami, které VZP v roce 2024 pozvala a nepřišly, a s rozpětím účinku ze studií. Skutečný účinek ověří pilot.</a:t>
+              <a:t>Účinky opatření ze studií, rozložení segmentů z pozvánek VZP 2024, přepočteno na všechny klientky VZP bez screeningu. Skutečný účinek ověří pilot.</a:t>
             </a:r>
           </a:p>
         </p:txBody>
@@ -7042,7 +7061,7 @@
                   <a:srgbClr val="D27869"/>
                 </a:solidFill>
               </a:rPr>
-              <a:t>207 tis.</a:t>
+              <a:t>≈ 480 tis.</a:t>
             </a:r>
           </a:p>
         </p:txBody>
@@ -7080,7 +7099,7 @@
                   <a:srgbClr val="4A4458"/>
                 </a:solidFill>
               </a:rPr>
-              <a:t>pozvaných žen nepřišlo (VZP 2024)</a:t>
+              <a:t>klientek VZP bez mamografie</a:t>
             </a:r>
           </a:p>
         </p:txBody>
@@ -7180,7 +7199,7 @@
                   <a:srgbClr val="003B7A"/>
                 </a:solidFill>
               </a:rPr>
-              <a:t>159 tis.</a:t>
+              <a:t>≈ 369 tis.</a:t>
             </a:r>
           </a:p>
         </p:txBody>
@@ -7318,7 +7337,7 @@
                   <a:srgbClr val="3D7CC9"/>
                 </a:solidFill>
               </a:rPr>
-              <a:t>+9–21 tis.</a:t>
+              <a:t>+22–49 tis.</a:t>
             </a:r>
           </a:p>
         </p:txBody>
@@ -7427,7 +7446,7 @@
                   <a:srgbClr val="003B7A"/>
                 </a:solidFill>
               </a:rPr>
-              <a:t>52–116</a:t>
+              <a:t>120–268</a:t>
             </a:r>
           </a:p>
         </p:txBody>
@@ -7536,7 +7555,7 @@
                   <a:srgbClr val="003B7A"/>
                 </a:solidFill>
               </a:rPr>
-              <a:t>6–14</a:t>
+              <a:t>14–32</a:t>
             </a:r>
           </a:p>
         </p:txBody>
@@ -7645,7 +7664,7 @@
                   <a:srgbClr val="003B7A"/>
                 </a:solidFill>
               </a:rPr>
-              <a:t>36–80</a:t>
+              <a:t>83–186</a:t>
             </a:r>
           </a:p>
         </p:txBody>
@@ -7754,7 +7773,7 @@
                   <a:srgbClr val="003B7A"/>
                 </a:solidFill>
               </a:rPr>
-              <a:t>+4,7–10,4 mil.</a:t>
+              <a:t>+10,8–24,0 mil.</a:t>
             </a:r>
           </a:p>
         </p:txBody>
@@ -7863,7 +7882,7 @@
                   <a:srgbClr val="4A4458"/>
                 </a:solidFill>
               </a:rPr>
-              <a:t>5–10 % teoretického stropu</a:t>
+              <a:t>9–20 % teoretického stropu.</a:t>
             </a:r>
             <a:r>
               <a:rPr sz="1050" b="0">
@@ -7871,7 +7890,7 @@
                   <a:srgbClr val="4A4458"/>
                 </a:solidFill>
               </a:rPr>
-              <a:t>, jen z cílených kanálů v segmentech B–E. Plošná digitální kaskáda podle finančního modelu přinese 156 mil. Kč čistě za 2027–2031.</a:t>
+              <a:t> Plošná SMS všem klientkám bez screeningu by podle studií (+2 až +5 p. b.) přidala 10–24 tis. mamografií; oslovuje ale tytéž ženy, takže se s cílenými kanály nesčítá.</a:t>
             </a:r>
           </a:p>
           <a:p>
@@ -8008,7 +8027,7 @@
                   <a:srgbClr val="8A8597"/>
                 </a:solidFill>
               </a:rPr>
-              <a:t>Zdroj: data VZP 2024; docs/interventions.md; finanční model týmu 16. 10. 2026; model posunu stadia (docs/vzp_pitch/dopad.py)</a:t>
+              <a:t>Zdroj: data VZP 2024; ÚZIS, ČSÚ, MZ ČR; docs/interventions.md; finanční model týmu 16. 10. 2026; model posunu stadia (dopad.py)</a:t>
             </a:r>
           </a:p>
         </p:txBody>
